--- a/yunqi-2026-pai-forum/docs/洞察一页-04-无尽前延：科学后训练（Auto-Research  Sc.pptx
+++ b/yunqi-2026-pai-forum/docs/洞察一页-04-无尽前延：科学后训练（Auto-Research  Sc.pptx
@@ -3141,7 +3141,7 @@
         <p:spPr>
           <a:xfrm>
             <a:off x="0" y="0"/>
-            <a:ext cx="12191695" cy="1051560"/>
+            <a:ext cx="12191695" cy="1097280"/>
           </a:xfrm>
           <a:prstGeom prst="rect">
             <a:avLst/>
@@ -3183,8 +3183,8 @@
         </p:nvSpPr>
         <p:spPr>
           <a:xfrm>
-            <a:off x="365760" y="146304"/>
-            <a:ext cx="11430000" cy="274320"/>
+            <a:off x="320040" y="91440"/>
+            <a:ext cx="11521440" cy="237744"/>
           </a:xfrm>
           <a:prstGeom prst="rect">
             <a:avLst/>
@@ -3199,7 +3199,7 @@
           <a:p>
             <a:pPr algn="l"/>
             <a:r>
-              <a:rPr sz="1300" b="0">
+              <a:rPr sz="1200" b="0">
                 <a:solidFill>
                   <a:srgbClr val="6B6B6B"/>
                 </a:solidFill>
@@ -3219,8 +3219,8 @@
         </p:nvSpPr>
         <p:spPr>
           <a:xfrm>
-            <a:off x="365760" y="420624"/>
-            <a:ext cx="11430000" cy="502920"/>
+            <a:off x="320040" y="347472"/>
+            <a:ext cx="11521440" cy="658368"/>
           </a:xfrm>
           <a:prstGeom prst="rect">
             <a:avLst/>
@@ -3235,7 +3235,7 @@
           <a:p>
             <a:pPr algn="l"/>
             <a:r>
-              <a:rPr sz="2000" b="1">
+              <a:rPr sz="1600" b="1">
                 <a:solidFill>
                   <a:srgbClr val="1A1A1A"/>
                 </a:solidFill>
@@ -3255,8 +3255,8 @@
         </p:nvSpPr>
         <p:spPr>
           <a:xfrm>
-            <a:off x="320040" y="1207008"/>
-            <a:ext cx="11521440" cy="502920"/>
+            <a:off x="274320" y="1207008"/>
+            <a:ext cx="11612880" cy="749808"/>
           </a:xfrm>
           <a:prstGeom prst="rect">
             <a:avLst/>
@@ -3300,8 +3300,8 @@
         </p:nvSpPr>
         <p:spPr>
           <a:xfrm>
-            <a:off x="457200" y="1298448"/>
-            <a:ext cx="11247120" cy="365760"/>
+            <a:off x="411480" y="1261872"/>
+            <a:ext cx="11338560" cy="640080"/>
           </a:xfrm>
           <a:prstGeom prst="rect">
             <a:avLst/>
@@ -3316,14 +3316,14 @@
           <a:p>
             <a:pPr algn="l"/>
             <a:r>
-              <a:rPr sz="1300" b="1">
+              <a:rPr sz="1200" b="1">
                 <a:solidFill>
                   <a:srgbClr val="1A1A1A"/>
                 </a:solidFill>
                 <a:latin typeface="Microsoft YaHei"/>
                 <a:ea typeface="Microsoft YaHei"/>
               </a:rPr>
-              <a:t>一句话判断：演讲从 AI4Science 转向 Science4AI，主张以 Coding/科研驱动的后训练 Scaling 比自然语言预训练更能高效提升智能。围绕 Auto-Research、SciMaster 加速真实理论研究…</a:t>
+              <a:t>一句话判断：演讲从 AI4Science 转向 Science4AI，主张以 Coding/科研驱动的后训练 Scaling 比自然语言预训练更能高效提升智能。</a:t>
             </a:r>
           </a:p>
         </p:txBody>
@@ -3336,8 +3336,8 @@
         </p:nvSpPr>
         <p:spPr>
           <a:xfrm>
-            <a:off x="320040" y="1874519"/>
-            <a:ext cx="3703320" cy="2606040"/>
+            <a:off x="274320" y="2084831"/>
+            <a:ext cx="3749039" cy="2267712"/>
           </a:xfrm>
           <a:prstGeom prst="rect">
             <a:avLst/>
@@ -3381,8 +3381,8 @@
         </p:nvSpPr>
         <p:spPr>
           <a:xfrm>
-            <a:off x="457200" y="2011679"/>
-            <a:ext cx="3429000" cy="320040"/>
+            <a:off x="402336" y="2176271"/>
+            <a:ext cx="3493007" cy="292608"/>
           </a:xfrm>
           <a:prstGeom prst="rect">
             <a:avLst/>
@@ -3397,14 +3397,14 @@
           <a:p>
             <a:pPr algn="l"/>
             <a:r>
-              <a:rPr sz="1500" b="1">
+              <a:rPr sz="1400" b="1">
                 <a:solidFill>
                   <a:srgbClr val="8B1A2B"/>
                 </a:solidFill>
                 <a:latin typeface="Microsoft YaHei"/>
                 <a:ea typeface="Microsoft YaHei"/>
               </a:rPr>
-              <a:t>01  定位澄清：Auto-Resea…</a:t>
+              <a:t>01  定位澄清</a:t>
             </a:r>
           </a:p>
         </p:txBody>
@@ -3417,8 +3417,8 @@
         </p:nvSpPr>
         <p:spPr>
           <a:xfrm>
-            <a:off x="484632" y="2377439"/>
-            <a:ext cx="3374136" cy="1965960"/>
+            <a:off x="402336" y="2487167"/>
+            <a:ext cx="3493007" cy="1764792"/>
           </a:xfrm>
           <a:prstGeom prst="rect">
             <a:avLst/>
@@ -3433,28 +3433,45 @@
           <a:p>
             <a:pPr algn="l">
               <a:spcAft>
-                <a:spcPts val="400"/>
+                <a:spcPts val="200"/>
               </a:spcAft>
             </a:pPr>
             <a:r>
-              <a:rPr sz="1200" b="1">
+              <a:rPr sz="1100" b="1">
                 <a:solidFill>
                   <a:srgbClr val="1A1A1A"/>
                 </a:solidFill>
                 <a:latin typeface="Microsoft YaHei"/>
                 <a:ea typeface="Microsoft YaHei"/>
               </a:rPr>
-              <a:t>强调 Auto-Research 覆盖面更广，AI4AI 只是其中组成部分而非全部</a:t>
+              <a:t>产品叙事上应区分「科研自动化」与「模型自改进」</a:t>
             </a:r>
           </a:p>
           <a:p>
             <a:pPr algn="l">
               <a:spcAft>
-                <a:spcPts val="400"/>
+                <a:spcPts val="200"/>
               </a:spcAft>
             </a:pPr>
             <a:r>
-              <a:rPr sz="1200" b="0">
+              <a:rPr sz="1100" b="0">
+                <a:solidFill>
+                  <a:srgbClr val="4A4A4A"/>
+                </a:solidFill>
+                <a:latin typeface="Microsoft YaHei"/>
+                <a:ea typeface="Microsoft YaHei"/>
+              </a:rPr>
+              <a:t>• 强调 Auto-Research 覆盖面更广，AI4AI 只是其中组成部分而非全部</a:t>
+            </a:r>
+          </a:p>
+          <a:p>
+            <a:pPr algn="l">
+              <a:spcAft>
+                <a:spcPts val="200"/>
+              </a:spcAft>
+            </a:pPr>
+            <a:r>
+              <a:rPr sz="1100" b="0">
                 <a:solidFill>
                   <a:srgbClr val="4A4A4A"/>
                 </a:solidFill>
@@ -3474,8 +3491,8 @@
         </p:nvSpPr>
         <p:spPr>
           <a:xfrm>
-            <a:off x="4224528" y="1874519"/>
-            <a:ext cx="3703320" cy="2606040"/>
+            <a:off x="4187951" y="2084831"/>
+            <a:ext cx="3749039" cy="2267712"/>
           </a:xfrm>
           <a:prstGeom prst="rect">
             <a:avLst/>
@@ -3519,8 +3536,8 @@
         </p:nvSpPr>
         <p:spPr>
           <a:xfrm>
-            <a:off x="4361688" y="2011679"/>
-            <a:ext cx="3429000" cy="320040"/>
+            <a:off x="4315967" y="2176271"/>
+            <a:ext cx="3493007" cy="292608"/>
           </a:xfrm>
           <a:prstGeom prst="rect">
             <a:avLst/>
@@ -3535,14 +3552,14 @@
           <a:p>
             <a:pPr algn="l"/>
             <a:r>
-              <a:rPr sz="1500" b="1">
+              <a:rPr sz="1400" b="1">
                 <a:solidFill>
                   <a:srgbClr val="8B1A2B"/>
                 </a:solidFill>
                 <a:latin typeface="Microsoft YaHei"/>
                 <a:ea typeface="Microsoft YaHei"/>
               </a:rPr>
-              <a:t>02  SciMaster：LQCD …</a:t>
+              <a:t>02  LQCD 真实理论研究小时级加速</a:t>
             </a:r>
           </a:p>
         </p:txBody>
@@ -3555,8 +3572,8 @@
         </p:nvSpPr>
         <p:spPr>
           <a:xfrm>
-            <a:off x="4389120" y="2377439"/>
-            <a:ext cx="3374136" cy="1965960"/>
+            <a:off x="4315967" y="2487167"/>
+            <a:ext cx="3493007" cy="1764792"/>
           </a:xfrm>
           <a:prstGeom prst="rect">
             <a:avLst/>
@@ -3571,28 +3588,45 @@
           <a:p>
             <a:pPr algn="l">
               <a:spcAft>
-                <a:spcPts val="400"/>
+                <a:spcPts val="200"/>
               </a:spcAft>
             </a:pPr>
             <a:r>
-              <a:rPr sz="1200" b="1">
+              <a:rPr sz="1100" b="1">
                 <a:solidFill>
                   <a:srgbClr val="1A1A1A"/>
                 </a:solidFill>
                 <a:latin typeface="Microsoft YaHei"/>
                 <a:ea typeface="Microsoft YaHei"/>
               </a:rPr>
-              <a:t>面向高能物理格点量子色动力学（LQCD），从准 TMD 波函数提取 Collins…</a:t>
+              <a:t>垂直科学 Agent 应打通「拟合-重整化-延拓」等学科流水线，并用与专家结果对齐的图线证据证明可信，而不只做文献问答。</a:t>
             </a:r>
           </a:p>
           <a:p>
             <a:pPr algn="l">
               <a:spcAft>
-                <a:spcPts val="400"/>
+                <a:spcPts val="200"/>
               </a:spcAft>
             </a:pPr>
             <a:r>
-              <a:rPr sz="1200" b="0">
+              <a:rPr sz="1100" b="0">
+                <a:solidFill>
+                  <a:srgbClr val="4A4A4A"/>
+                </a:solidFill>
+                <a:latin typeface="Microsoft YaHei"/>
+                <a:ea typeface="Microsoft YaHei"/>
+              </a:rPr>
+              <a:t>• 面向高能物理格点量子色动力学（LQCD），从准 TMD 波函数提取 Collins-Soper kernel</a:t>
+            </a:r>
+          </a:p>
+          <a:p>
+            <a:pPr algn="l">
+              <a:spcAft>
+                <a:spcPts val="200"/>
+              </a:spcAft>
+            </a:pPr>
+            <a:r>
+              <a:rPr sz="1100" b="0">
                 <a:solidFill>
                   <a:srgbClr val="4A4A4A"/>
                 </a:solidFill>
@@ -3605,11 +3639,11 @@
           <a:p>
             <a:pPr algn="l">
               <a:spcAft>
-                <a:spcPts val="400"/>
+                <a:spcPts val="200"/>
               </a:spcAft>
             </a:pPr>
             <a:r>
-              <a:rPr sz="1200" b="0">
+              <a:rPr sz="1100" b="0">
                 <a:solidFill>
                   <a:srgbClr val="4A4A4A"/>
                 </a:solidFill>
@@ -3629,8 +3663,8 @@
         </p:nvSpPr>
         <p:spPr>
           <a:xfrm>
-            <a:off x="8129016" y="1874519"/>
-            <a:ext cx="3703320" cy="2606040"/>
+            <a:off x="8101582" y="2084831"/>
+            <a:ext cx="3749039" cy="2267712"/>
           </a:xfrm>
           <a:prstGeom prst="rect">
             <a:avLst/>
@@ -3674,8 +3708,8 @@
         </p:nvSpPr>
         <p:spPr>
           <a:xfrm>
-            <a:off x="8266176" y="2011679"/>
-            <a:ext cx="3429000" cy="320040"/>
+            <a:off x="8229598" y="2176271"/>
+            <a:ext cx="3493007" cy="292608"/>
           </a:xfrm>
           <a:prstGeom prst="rect">
             <a:avLst/>
@@ -3690,14 +3724,14 @@
           <a:p>
             <a:pPr algn="l"/>
             <a:r>
-              <a:rPr sz="1500" b="1">
+              <a:rPr sz="1400" b="1">
                 <a:solidFill>
                   <a:srgbClr val="8B1A2B"/>
                 </a:solidFill>
                 <a:latin typeface="Microsoft YaHei"/>
                 <a:ea typeface="Microsoft YaHei"/>
               </a:rPr>
-              <a:t>03  FrontierScience…</a:t>
+              <a:t>03  区分奥赛能力与研究能力</a:t>
             </a:r>
           </a:p>
         </p:txBody>
@@ -3710,8 +3744,8 @@
         </p:nvSpPr>
         <p:spPr>
           <a:xfrm>
-            <a:off x="8293608" y="2377439"/>
-            <a:ext cx="3374136" cy="1965960"/>
+            <a:off x="8229598" y="2487167"/>
+            <a:ext cx="3493007" cy="1764792"/>
           </a:xfrm>
           <a:prstGeom prst="rect">
             <a:avLst/>
@@ -3726,28 +3760,45 @@
           <a:p>
             <a:pPr algn="l">
               <a:spcAft>
-                <a:spcPts val="400"/>
+                <a:spcPts val="200"/>
               </a:spcAft>
             </a:pPr>
             <a:r>
-              <a:rPr sz="1200" b="1">
+              <a:rPr sz="1100" b="1">
                 <a:solidFill>
                   <a:srgbClr val="1A1A1A"/>
                 </a:solidFill>
                 <a:latin typeface="Microsoft YaHei"/>
                 <a:ea typeface="Microsoft YaHei"/>
               </a:rPr>
-              <a:t>发布面向物理/化学/生物专家级推理的 FrontierScience Benchm…</a:t>
+              <a:t>科学后训练数据飞轮必须解决「高难度可规模化」供给</a:t>
             </a:r>
           </a:p>
           <a:p>
             <a:pPr algn="l">
               <a:spcAft>
-                <a:spcPts val="400"/>
+                <a:spcPts val="200"/>
               </a:spcAft>
             </a:pPr>
             <a:r>
-              <a:rPr sz="1200" b="0">
+              <a:rPr sz="1100" b="0">
+                <a:solidFill>
+                  <a:srgbClr val="4A4A4A"/>
+                </a:solidFill>
+                <a:latin typeface="Microsoft YaHei"/>
+                <a:ea typeface="Microsoft YaHei"/>
+              </a:rPr>
+              <a:t>• 发布面向物理/化学/生物专家级推理的 FrontierScience Benchmark</a:t>
+            </a:r>
+          </a:p>
+          <a:p>
+            <a:pPr algn="l">
+              <a:spcAft>
+                <a:spcPts val="200"/>
+              </a:spcAft>
+            </a:pPr>
+            <a:r>
+              <a:rPr sz="1100" b="0">
                 <a:solidFill>
                   <a:srgbClr val="4A4A4A"/>
                 </a:solidFill>
@@ -3760,11 +3811,11 @@
           <a:p>
             <a:pPr algn="l">
               <a:spcAft>
-                <a:spcPts val="400"/>
+                <a:spcPts val="200"/>
               </a:spcAft>
             </a:pPr>
             <a:r>
-              <a:rPr sz="1200" b="0">
+              <a:rPr sz="1100" b="0">
                 <a:solidFill>
                   <a:srgbClr val="4A4A4A"/>
                 </a:solidFill>
@@ -3784,8 +3835,8 @@
         </p:nvSpPr>
         <p:spPr>
           <a:xfrm>
-            <a:off x="320040" y="4617720"/>
-            <a:ext cx="7315200" cy="256032"/>
+            <a:off x="274320" y="4553712"/>
+            <a:ext cx="7315200" cy="237744"/>
           </a:xfrm>
           <a:prstGeom prst="rect">
             <a:avLst/>
@@ -3800,7 +3851,7 @@
           <a:p>
             <a:pPr algn="l"/>
             <a:r>
-              <a:rPr sz="1400" b="1">
+              <a:rPr sz="1300" b="1">
                 <a:solidFill>
                   <a:srgbClr val="1A1A1A"/>
                 </a:solidFill>
@@ -3820,8 +3871,8 @@
         </p:nvSpPr>
         <p:spPr>
           <a:xfrm>
-            <a:off x="320040" y="4910328"/>
-            <a:ext cx="1847088" cy="868680"/>
+            <a:off x="274320" y="4809744"/>
+            <a:ext cx="1874519" cy="960120"/>
           </a:xfrm>
           <a:prstGeom prst="rect">
             <a:avLst/>
@@ -3865,8 +3916,8 @@
         </p:nvSpPr>
         <p:spPr>
           <a:xfrm>
-            <a:off x="429768" y="4965192"/>
-            <a:ext cx="1664208" cy="201168"/>
+            <a:off x="365760" y="4864608"/>
+            <a:ext cx="1709927" cy="201168"/>
           </a:xfrm>
           <a:prstGeom prst="rect">
             <a:avLst/>
@@ -3888,7 +3939,7 @@
                 <a:latin typeface="Microsoft YaHei"/>
                 <a:ea typeface="Microsoft YaHei"/>
               </a:rPr>
-              <a:t>定位澄清：Auto-R…</a:t>
+              <a:t>定位澄清</a:t>
             </a:r>
           </a:p>
         </p:txBody>
@@ -3901,8 +3952,8 @@
         </p:nvSpPr>
         <p:spPr>
           <a:xfrm>
-            <a:off x="429768" y="5166360"/>
-            <a:ext cx="1664208" cy="237744"/>
+            <a:off x="365760" y="5065776"/>
+            <a:ext cx="1709927" cy="256032"/>
           </a:xfrm>
           <a:prstGeom prst="rect">
             <a:avLst/>
@@ -3924,7 +3975,7 @@
                 <a:latin typeface="Microsoft YaHei"/>
                 <a:ea typeface="Microsoft YaHei"/>
               </a:rPr>
-              <a:t>强调 Auto-Researc…</a:t>
+              <a:t>核心口径</a:t>
             </a:r>
           </a:p>
         </p:txBody>
@@ -3937,8 +3988,8 @@
         </p:nvSpPr>
         <p:spPr>
           <a:xfrm>
-            <a:off x="429768" y="5413248"/>
-            <a:ext cx="1664208" cy="292608"/>
+            <a:off x="365760" y="5340096"/>
+            <a:ext cx="1709927" cy="365760"/>
           </a:xfrm>
           <a:prstGeom prst="rect">
             <a:avLst/>
@@ -3953,14 +4004,14 @@
           <a:p>
             <a:pPr algn="l"/>
             <a:r>
-              <a:rPr sz="1400" b="1">
+              <a:rPr sz="1200" b="1">
                 <a:solidFill>
                   <a:srgbClr val="8B1A2B"/>
                 </a:solidFill>
                 <a:latin typeface="Microsoft YaHei"/>
                 <a:ea typeface="Microsoft YaHei"/>
               </a:rPr>
-              <a:t>强调 Auto-Resea…</a:t>
+              <a:t>强调 Auto-Research 覆盖面更广</a:t>
             </a:r>
           </a:p>
         </p:txBody>
@@ -3973,8 +4024,8 @@
         </p:nvSpPr>
         <p:spPr>
           <a:xfrm>
-            <a:off x="2276856" y="4910328"/>
-            <a:ext cx="1847088" cy="868680"/>
+            <a:off x="2240279" y="4809744"/>
+            <a:ext cx="1874519" cy="960120"/>
           </a:xfrm>
           <a:prstGeom prst="rect">
             <a:avLst/>
@@ -4018,8 +4069,8 @@
         </p:nvSpPr>
         <p:spPr>
           <a:xfrm>
-            <a:off x="2386584" y="4965192"/>
-            <a:ext cx="1664208" cy="201168"/>
+            <a:off x="2331719" y="4864608"/>
+            <a:ext cx="1709927" cy="201168"/>
           </a:xfrm>
           <a:prstGeom prst="rect">
             <a:avLst/>
@@ -4041,7 +4092,7 @@
                 <a:latin typeface="Microsoft YaHei"/>
                 <a:ea typeface="Microsoft YaHei"/>
               </a:rPr>
-              <a:t>SciMaster：L…</a:t>
+              <a:t>SciMaster</a:t>
             </a:r>
           </a:p>
         </p:txBody>
@@ -4054,8 +4105,8 @@
         </p:nvSpPr>
         <p:spPr>
           <a:xfrm>
-            <a:off x="2386584" y="5166360"/>
-            <a:ext cx="1664208" cy="237744"/>
+            <a:off x="2331719" y="5065776"/>
+            <a:ext cx="1709927" cy="256032"/>
           </a:xfrm>
           <a:prstGeom prst="rect">
             <a:avLst/>
@@ -4077,7 +4128,7 @@
                 <a:latin typeface="Microsoft YaHei"/>
                 <a:ea typeface="Microsoft YaHei"/>
               </a:rPr>
-              <a:t>Collins-Soper k…</a:t>
+              <a:t>演讲口径</a:t>
             </a:r>
           </a:p>
         </p:txBody>
@@ -4090,8 +4141,8 @@
         </p:nvSpPr>
         <p:spPr>
           <a:xfrm>
-            <a:off x="2386584" y="5413248"/>
-            <a:ext cx="1664208" cy="292608"/>
+            <a:off x="2331719" y="5340096"/>
+            <a:ext cx="1709927" cy="365760"/>
           </a:xfrm>
           <a:prstGeom prst="rect">
             <a:avLst/>
@@ -4106,14 +4157,14 @@
           <a:p>
             <a:pPr algn="l"/>
             <a:r>
-              <a:rPr sz="1400" b="1">
+              <a:rPr sz="1200" b="1">
                 <a:solidFill>
                   <a:srgbClr val="8B1A2B"/>
                 </a:solidFill>
                 <a:latin typeface="Microsoft YaHei"/>
                 <a:ea typeface="Microsoft YaHei"/>
               </a:rPr>
-              <a:t>相对传统周期约 120x~360x…</a:t>
+              <a:t>SciMaster 约 6 小时得到原先 1~3 个月严谨计算结果</a:t>
             </a:r>
           </a:p>
         </p:txBody>
@@ -4126,8 +4177,8 @@
         </p:nvSpPr>
         <p:spPr>
           <a:xfrm>
-            <a:off x="4233672" y="4910328"/>
-            <a:ext cx="1847088" cy="868680"/>
+            <a:off x="4206238" y="4809744"/>
+            <a:ext cx="1874519" cy="960120"/>
           </a:xfrm>
           <a:prstGeom prst="rect">
             <a:avLst/>
@@ -4171,8 +4222,8 @@
         </p:nvSpPr>
         <p:spPr>
           <a:xfrm>
-            <a:off x="4343400" y="4965192"/>
-            <a:ext cx="1664208" cy="201168"/>
+            <a:off x="4297678" y="4864608"/>
+            <a:ext cx="1709927" cy="201168"/>
           </a:xfrm>
           <a:prstGeom prst="rect">
             <a:avLst/>
@@ -4194,7 +4245,7 @@
                 <a:latin typeface="Microsoft YaHei"/>
                 <a:ea typeface="Microsoft YaHei"/>
               </a:rPr>
-              <a:t>FrontierSci…</a:t>
+              <a:t>SciMaster·2</a:t>
             </a:r>
           </a:p>
         </p:txBody>
@@ -4207,8 +4258,8 @@
         </p:nvSpPr>
         <p:spPr>
           <a:xfrm>
-            <a:off x="4343400" y="5166360"/>
-            <a:ext cx="1664208" cy="237744"/>
+            <a:off x="4297678" y="5065776"/>
+            <a:ext cx="1709927" cy="256032"/>
           </a:xfrm>
           <a:prstGeom prst="rect">
             <a:avLst/>
@@ -4230,7 +4281,7 @@
                 <a:latin typeface="Microsoft YaHei"/>
                 <a:ea typeface="Microsoft YaHei"/>
               </a:rPr>
-              <a:t>Research 顶尖约 25…</a:t>
+              <a:t>演讲口径</a:t>
             </a:r>
           </a:p>
         </p:txBody>
@@ -4243,8 +4294,8 @@
         </p:nvSpPr>
         <p:spPr>
           <a:xfrm>
-            <a:off x="4343400" y="5413248"/>
-            <a:ext cx="1664208" cy="292608"/>
+            <a:off x="4297678" y="5340096"/>
+            <a:ext cx="1709927" cy="365760"/>
           </a:xfrm>
           <a:prstGeom prst="rect">
             <a:avLst/>
@@ -4259,14 +4310,14 @@
           <a:p>
             <a:pPr algn="l"/>
             <a:r>
-              <a:rPr sz="1400" b="1">
+              <a:rPr sz="1200" b="1">
                 <a:solidFill>
                   <a:srgbClr val="8B1A2B"/>
                 </a:solidFill>
                 <a:latin typeface="Microsoft YaHei"/>
                 <a:ea typeface="Microsoft YaHei"/>
               </a:rPr>
-              <a:t>Olympiad 顶尖约 77.1%</a:t>
+              <a:t>Collins-Soper kernel 提取范围扩展至 b⊥=1 fm</a:t>
             </a:r>
           </a:p>
         </p:txBody>
@@ -4279,8 +4330,8 @@
         </p:nvSpPr>
         <p:spPr>
           <a:xfrm>
-            <a:off x="6190488" y="4910328"/>
-            <a:ext cx="1847088" cy="868680"/>
+            <a:off x="6172197" y="4809744"/>
+            <a:ext cx="1874519" cy="960120"/>
           </a:xfrm>
           <a:prstGeom prst="rect">
             <a:avLst/>
@@ -4324,8 +4375,8 @@
         </p:nvSpPr>
         <p:spPr>
           <a:xfrm>
-            <a:off x="6300216" y="4965192"/>
-            <a:ext cx="1664208" cy="201168"/>
+            <a:off x="6263637" y="4864608"/>
+            <a:ext cx="1709927" cy="201168"/>
           </a:xfrm>
           <a:prstGeom prst="rect">
             <a:avLst/>
@@ -4347,7 +4398,7 @@
                 <a:latin typeface="Microsoft YaHei"/>
                 <a:ea typeface="Microsoft YaHei"/>
               </a:rPr>
-              <a:t>BigBang-V1（…</a:t>
+              <a:t>SciMaster·3</a:t>
             </a:r>
           </a:p>
         </p:txBody>
@@ -4360,8 +4411,8 @@
         </p:nvSpPr>
         <p:spPr>
           <a:xfrm>
-            <a:off x="6300216" y="5166360"/>
-            <a:ext cx="1664208" cy="237744"/>
+            <a:off x="6263637" y="5065776"/>
+            <a:ext cx="1709927" cy="256032"/>
           </a:xfrm>
           <a:prstGeom prst="rect">
             <a:avLst/>
@@ -4383,7 +4434,7 @@
                 <a:latin typeface="Microsoft YaHei"/>
                 <a:ea typeface="Microsoft YaHei"/>
               </a:rPr>
-              <a:t>Humanity's Last…</a:t>
+              <a:t>演讲口径</a:t>
             </a:r>
           </a:p>
         </p:txBody>
@@ -4396,8 +4447,8 @@
         </p:nvSpPr>
         <p:spPr>
           <a:xfrm>
-            <a:off x="6300216" y="5413248"/>
-            <a:ext cx="1664208" cy="292608"/>
+            <a:off x="6263637" y="5340096"/>
+            <a:ext cx="1709927" cy="365760"/>
           </a:xfrm>
           <a:prstGeom prst="rect">
             <a:avLst/>
@@ -4412,14 +4463,14 @@
           <a:p>
             <a:pPr algn="l"/>
             <a:r>
-              <a:rPr sz="1400" b="1">
+              <a:rPr sz="1200" b="1">
                 <a:solidFill>
                   <a:srgbClr val="8B1A2B"/>
                 </a:solidFill>
                 <a:latin typeface="Microsoft YaHei"/>
                 <a:ea typeface="Microsoft YaHei"/>
               </a:rPr>
-              <a:t>BrowseComp 79.9</a:t>
+              <a:t>相对传统周期约 120x~360x 加速</a:t>
             </a:r>
           </a:p>
         </p:txBody>
@@ -4432,8 +4483,8 @@
         </p:nvSpPr>
         <p:spPr>
           <a:xfrm>
-            <a:off x="8147304" y="4910328"/>
-            <a:ext cx="1847088" cy="868680"/>
+            <a:off x="8138156" y="4809744"/>
+            <a:ext cx="1874519" cy="960120"/>
           </a:xfrm>
           <a:prstGeom prst="rect">
             <a:avLst/>
@@ -4477,8 +4528,8 @@
         </p:nvSpPr>
         <p:spPr>
           <a:xfrm>
-            <a:off x="8257032" y="4965192"/>
-            <a:ext cx="1664208" cy="201168"/>
+            <a:off x="8229596" y="4864608"/>
+            <a:ext cx="1709927" cy="201168"/>
           </a:xfrm>
           <a:prstGeom prst="rect">
             <a:avLst/>
@@ -4500,7 +4551,7 @@
                 <a:latin typeface="Microsoft YaHei"/>
                 <a:ea typeface="Microsoft YaHei"/>
               </a:rPr>
-              <a:t>科学软件加速与多智能体…</a:t>
+              <a:t>区分奥赛能力与研究能力</a:t>
             </a:r>
           </a:p>
         </p:txBody>
@@ -4513,8 +4564,8 @@
         </p:nvSpPr>
         <p:spPr>
           <a:xfrm>
-            <a:off x="8257032" y="5166360"/>
-            <a:ext cx="1664208" cy="237744"/>
+            <a:off x="8229596" y="5065776"/>
+            <a:ext cx="1709927" cy="256032"/>
           </a:xfrm>
           <a:prstGeom prst="rect">
             <a:avLst/>
@@ -4536,7 +4587,7 @@
                 <a:latin typeface="Microsoft YaHei"/>
                 <a:ea typeface="Microsoft YaHei"/>
               </a:rPr>
-              <a:t>覆盖 2000+ 任务</a:t>
+              <a:t>演讲口径</a:t>
             </a:r>
           </a:p>
         </p:txBody>
@@ -4549,8 +4600,8 @@
         </p:nvSpPr>
         <p:spPr>
           <a:xfrm>
-            <a:off x="8257032" y="5413248"/>
-            <a:ext cx="1664208" cy="292608"/>
+            <a:off x="8229596" y="5340096"/>
+            <a:ext cx="1709927" cy="365760"/>
           </a:xfrm>
           <a:prstGeom prst="rect">
             <a:avLst/>
@@ -4565,14 +4616,14 @@
           <a:p>
             <a:pPr algn="l"/>
             <a:r>
-              <a:rPr sz="1400" b="1">
+              <a:rPr sz="1200" b="1">
                 <a:solidFill>
                   <a:srgbClr val="8B1A2B"/>
                 </a:solidFill>
                 <a:latin typeface="Microsoft YaHei"/>
                 <a:ea typeface="Microsoft YaHei"/>
               </a:rPr>
-              <a:t>覆盖 2000+ 任务</a:t>
+              <a:t>Olympiad 顶尖约 77.1%</a:t>
             </a:r>
           </a:p>
         </p:txBody>
@@ -4585,8 +4636,8 @@
         </p:nvSpPr>
         <p:spPr>
           <a:xfrm>
-            <a:off x="10104120" y="4910328"/>
-            <a:ext cx="1847088" cy="868680"/>
+            <a:off x="10104115" y="4809744"/>
+            <a:ext cx="1874519" cy="960120"/>
           </a:xfrm>
           <a:prstGeom prst="rect">
             <a:avLst/>
@@ -4630,8 +4681,8 @@
         </p:nvSpPr>
         <p:spPr>
           <a:xfrm>
-            <a:off x="10213848" y="4965192"/>
-            <a:ext cx="1664208" cy="201168"/>
+            <a:off x="10195555" y="4864608"/>
+            <a:ext cx="1709927" cy="201168"/>
           </a:xfrm>
           <a:prstGeom prst="rect">
             <a:avLst/>
@@ -4653,7 +4704,7 @@
                 <a:latin typeface="Microsoft YaHei"/>
                 <a:ea typeface="Microsoft YaHei"/>
               </a:rPr>
-              <a:t>—</a:t>
+              <a:t>区分奥赛能力与研究能力·2</a:t>
             </a:r>
           </a:p>
         </p:txBody>
@@ -4666,8 +4717,8 @@
         </p:nvSpPr>
         <p:spPr>
           <a:xfrm>
-            <a:off x="10213848" y="5166360"/>
-            <a:ext cx="1664208" cy="237744"/>
+            <a:off x="10195555" y="5065776"/>
+            <a:ext cx="1709927" cy="256032"/>
           </a:xfrm>
           <a:prstGeom prst="rect">
             <a:avLst/>
@@ -4689,7 +4740,7 @@
                 <a:latin typeface="Microsoft YaHei"/>
                 <a:ea typeface="Microsoft YaHei"/>
               </a:rPr>
-              <a:t>—</a:t>
+              <a:t>演讲口径</a:t>
             </a:r>
           </a:p>
         </p:txBody>
@@ -4702,8 +4753,8 @@
         </p:nvSpPr>
         <p:spPr>
           <a:xfrm>
-            <a:off x="10213848" y="5413248"/>
-            <a:ext cx="1664208" cy="292608"/>
+            <a:off x="10195555" y="5340096"/>
+            <a:ext cx="1709927" cy="365760"/>
           </a:xfrm>
           <a:prstGeom prst="rect">
             <a:avLst/>
@@ -4718,14 +4769,14 @@
           <a:p>
             <a:pPr algn="l"/>
             <a:r>
-              <a:rPr sz="1400" b="1">
+              <a:rPr sz="1200" b="1">
                 <a:solidFill>
                   <a:srgbClr val="8B1A2B"/>
                 </a:solidFill>
                 <a:latin typeface="Microsoft YaHei"/>
                 <a:ea typeface="Microsoft YaHei"/>
               </a:rPr>
-              <a:t>—</a:t>
+              <a:t>Research 顶尖约 25.2%</a:t>
             </a:r>
           </a:p>
         </p:txBody>
@@ -4738,8 +4789,8 @@
         </p:nvSpPr>
         <p:spPr>
           <a:xfrm>
-            <a:off x="0" y="5989320"/>
-            <a:ext cx="12191695" cy="868680"/>
+            <a:off x="0" y="5870448"/>
+            <a:ext cx="12191695" cy="987552"/>
           </a:xfrm>
           <a:prstGeom prst="rect">
             <a:avLst/>
@@ -4781,8 +4832,8 @@
         </p:nvSpPr>
         <p:spPr>
           <a:xfrm>
-            <a:off x="365760" y="6080760"/>
-            <a:ext cx="11430000" cy="256032"/>
+            <a:off x="320040" y="5943600"/>
+            <a:ext cx="11521440" cy="502920"/>
           </a:xfrm>
           <a:prstGeom prst="rect">
             <a:avLst/>
@@ -4797,14 +4848,14 @@
           <a:p>
             <a:pPr algn="l"/>
             <a:r>
-              <a:rPr sz="1200" b="1">
+              <a:rPr sz="1100" b="1">
                 <a:solidFill>
                   <a:srgbClr val="1A1A1A"/>
                 </a:solidFill>
                 <a:latin typeface="Microsoft YaHei"/>
                 <a:ea typeface="Microsoft YaHei"/>
               </a:rPr>
-              <a:t>可落地动作：科学后训练的价值在于把 AI 嵌入真实理论计算与科研协作，而非停留在通用对话能力。；用 FrontierScience 等研究级评测牵引数据与训练，才能缩小「会考试」与「会研究」的鸿沟。</a:t>
+              <a:t>可落地动作：科学后训练的价值在于把 AI 嵌入真实理论计算与科研协作，而非停留在通用对话能力；用 FrontierScience 等研究级评测牵引数据与训练，才能缩小「会考试」与「会研究」的鸿沟；友商可借鉴「中等参数 + 强后训练 + 多 Agent 科研环境」路线，在垂直科学场景形成差异化。</a:t>
             </a:r>
           </a:p>
         </p:txBody>
@@ -4817,8 +4868,8 @@
         </p:nvSpPr>
         <p:spPr>
           <a:xfrm>
-            <a:off x="365760" y="6373368"/>
-            <a:ext cx="11430000" cy="256032"/>
+            <a:off x="320040" y="6437376"/>
+            <a:ext cx="11521440" cy="256032"/>
           </a:xfrm>
           <a:prstGeom prst="rect">
             <a:avLst/>
@@ -4833,7 +4884,7 @@
           <a:p>
             <a:pPr algn="l"/>
             <a:r>
-              <a:rPr sz="1000" b="0">
+              <a:rPr sz="900" b="0">
                 <a:solidFill>
                   <a:srgbClr val="6B6B6B"/>
                 </a:solidFill>
@@ -5075,7 +5126,7 @@
         <p:spPr>
           <a:xfrm>
             <a:off x="429768" y="1143000"/>
-            <a:ext cx="3496970" cy="292608"/>
+            <a:ext cx="3496970" cy="384048"/>
           </a:xfrm>
           <a:prstGeom prst="rect">
             <a:avLst/>
@@ -5097,7 +5148,7 @@
                 <a:latin typeface="Microsoft YaHei"/>
                 <a:ea typeface="Microsoft YaHei"/>
               </a:rPr>
-              <a:t>定位澄清：Auto-Research …</a:t>
+              <a:t>定位澄清</a:t>
             </a:r>
           </a:p>
         </p:txBody>
@@ -5118,7 +5169,7 @@
         </p:blipFill>
         <p:spPr>
           <a:xfrm>
-            <a:off x="429768" y="1928092"/>
+            <a:off x="429768" y="1946380"/>
             <a:ext cx="3496970" cy="2965239"/>
           </a:xfrm>
           <a:prstGeom prst="rect">
@@ -5157,7 +5208,7 @@
                 <a:latin typeface="Microsoft YaHei"/>
                 <a:ea typeface="Microsoft YaHei"/>
               </a:rPr>
-              <a:t>定位澄清：Auto-Research 包含但不是 AI…</a:t>
+              <a:t>定位澄清：Auto-Research 包含但不是 AI4AI</a:t>
             </a:r>
           </a:p>
         </p:txBody>
@@ -5216,7 +5267,7 @@
         <p:spPr>
           <a:xfrm>
             <a:off x="4347362" y="1143000"/>
-            <a:ext cx="3496970" cy="292608"/>
+            <a:ext cx="3496970" cy="384048"/>
           </a:xfrm>
           <a:prstGeom prst="rect">
             <a:avLst/>
@@ -5238,7 +5289,7 @@
                 <a:latin typeface="Microsoft YaHei"/>
                 <a:ea typeface="Microsoft YaHei"/>
               </a:rPr>
-              <a:t>相对传统周期约 120x~360x…</a:t>
+              <a:t>SciMaster 约 6 小时得到原先 1~3 个月严谨计算结果 · Collins-Soper kernel 提取范围扩展至 b⊥=1 fm</a:t>
             </a:r>
           </a:p>
         </p:txBody>
@@ -5259,7 +5310,7 @@
         </p:blipFill>
         <p:spPr>
           <a:xfrm>
-            <a:off x="4347362" y="1928092"/>
+            <a:off x="4347362" y="1946380"/>
             <a:ext cx="3496970" cy="2965239"/>
           </a:xfrm>
           <a:prstGeom prst="rect">
@@ -5357,7 +5408,7 @@
         <p:spPr>
           <a:xfrm>
             <a:off x="8264956" y="1143000"/>
-            <a:ext cx="3496970" cy="292608"/>
+            <a:ext cx="3496970" cy="384048"/>
           </a:xfrm>
           <a:prstGeom prst="rect">
             <a:avLst/>
@@ -5379,7 +5430,7 @@
                 <a:latin typeface="Microsoft YaHei"/>
                 <a:ea typeface="Microsoft YaHei"/>
               </a:rPr>
-              <a:t>Olympiad 顶尖约 77.1%</a:t>
+              <a:t>Olympiad 顶尖约 77.1% · Research 顶尖约 25.2%</a:t>
             </a:r>
           </a:p>
         </p:txBody>
@@ -5400,7 +5451,7 @@
         </p:blipFill>
         <p:spPr>
           <a:xfrm>
-            <a:off x="8264956" y="1928092"/>
+            <a:off x="8264956" y="1946380"/>
             <a:ext cx="3496970" cy="2965239"/>
           </a:xfrm>
           <a:prstGeom prst="rect">

--- a/yunqi-2026-pai-forum/docs/洞察一页-04-无尽前延：科学后训练（Auto-Research  Sc.pptx
+++ b/yunqi-2026-pai-forum/docs/洞察一页-04-无尽前延：科学后训练（Auto-Research  Sc.pptx
@@ -3323,7 +3323,7 @@
                 <a:latin typeface="Microsoft YaHei"/>
                 <a:ea typeface="Microsoft YaHei"/>
               </a:rPr>
-              <a:t>一句话判断：演讲从 AI4Science 转向 Science4AI，主张以 Coding/科研驱动的后训练 Scaling 比自然语言预训练更能高效提升智能。</a:t>
+              <a:t>一句话判断：无尽前延（Endless Frontier） 无尽前延——AI4Science 转向 Science4AI，主张以 Coding/科研驱动的后训练 Scaling 比自然语言预训练更能高效提升智能。</a:t>
             </a:r>
           </a:p>
         </p:txBody>
@@ -3939,7 +3939,7 @@
                 <a:latin typeface="Microsoft YaHei"/>
                 <a:ea typeface="Microsoft YaHei"/>
               </a:rPr>
-              <a:t>定位澄清</a:t>
+              <a:t>Olympiad 顶尖</a:t>
             </a:r>
           </a:p>
         </p:txBody>
@@ -3975,7 +3975,7 @@
                 <a:latin typeface="Microsoft YaHei"/>
                 <a:ea typeface="Microsoft YaHei"/>
               </a:rPr>
-              <a:t>核心口径</a:t>
+              <a:t>区分奥赛能力与研究能力</a:t>
             </a:r>
           </a:p>
         </p:txBody>
@@ -4011,7 +4011,7 @@
                 <a:latin typeface="Microsoft YaHei"/>
                 <a:ea typeface="Microsoft YaHei"/>
               </a:rPr>
-              <a:t>强调 Auto-Research 覆盖面更广</a:t>
+              <a:t>约 77.1%</a:t>
             </a:r>
           </a:p>
         </p:txBody>
@@ -4092,7 +4092,7 @@
                 <a:latin typeface="Microsoft YaHei"/>
                 <a:ea typeface="Microsoft YaHei"/>
               </a:rPr>
-              <a:t>SciMaster</a:t>
+              <a:t>Research 顶尖</a:t>
             </a:r>
           </a:p>
         </p:txBody>
@@ -4128,7 +4128,7 @@
                 <a:latin typeface="Microsoft YaHei"/>
                 <a:ea typeface="Microsoft YaHei"/>
               </a:rPr>
-              <a:t>演讲口径</a:t>
+              <a:t>区分奥赛能力与研究能力</a:t>
             </a:r>
           </a:p>
         </p:txBody>
@@ -4164,7 +4164,7 @@
                 <a:latin typeface="Microsoft YaHei"/>
                 <a:ea typeface="Microsoft YaHei"/>
               </a:rPr>
-              <a:t>SciMaster 约 6 小时得到原先 1~3 个月严谨计算结果</a:t>
+              <a:t>约 25.2%</a:t>
             </a:r>
           </a:p>
         </p:txBody>
@@ -4245,7 +4245,7 @@
                 <a:latin typeface="Microsoft YaHei"/>
                 <a:ea typeface="Microsoft YaHei"/>
               </a:rPr>
-              <a:t>SciMaster·2</a:t>
+              <a:t>SciMaster</a:t>
             </a:r>
           </a:p>
         </p:txBody>
@@ -4281,7 +4281,7 @@
                 <a:latin typeface="Microsoft YaHei"/>
                 <a:ea typeface="Microsoft YaHei"/>
               </a:rPr>
-              <a:t>演讲口径</a:t>
+              <a:t>关键能力</a:t>
             </a:r>
           </a:p>
         </p:txBody>
@@ -4317,7 +4317,7 @@
                 <a:latin typeface="Microsoft YaHei"/>
                 <a:ea typeface="Microsoft YaHei"/>
               </a:rPr>
-              <a:t>Collins-Soper kernel 提取范围扩展至 b⊥=1 fm</a:t>
+              <a:t>相对传统周期约 120x~360x 加速</a:t>
             </a:r>
           </a:p>
         </p:txBody>
@@ -4398,7 +4398,7 @@
                 <a:latin typeface="Microsoft YaHei"/>
                 <a:ea typeface="Microsoft YaHei"/>
               </a:rPr>
-              <a:t>SciMaster·3</a:t>
+              <a:t>低端模型 Research 接近</a:t>
             </a:r>
           </a:p>
         </p:txBody>
@@ -4434,7 +4434,7 @@
                 <a:latin typeface="Microsoft YaHei"/>
                 <a:ea typeface="Microsoft YaHei"/>
               </a:rPr>
-              <a:t>演讲口径</a:t>
+              <a:t>区分奥赛能力与研究能力</a:t>
             </a:r>
           </a:p>
         </p:txBody>
@@ -4470,7 +4470,7 @@
                 <a:latin typeface="Microsoft YaHei"/>
                 <a:ea typeface="Microsoft YaHei"/>
               </a:rPr>
-              <a:t>相对传统周期约 120x~360x 加速</a:t>
+              <a:t>0.4%</a:t>
             </a:r>
           </a:p>
         </p:txBody>
@@ -4551,7 +4551,7 @@
                 <a:latin typeface="Microsoft YaHei"/>
                 <a:ea typeface="Microsoft YaHei"/>
               </a:rPr>
-              <a:t>区分奥赛能力与研究能力</a:t>
+              <a:t>科学软件加速与多智能体科研演化</a:t>
             </a:r>
           </a:p>
         </p:txBody>
@@ -4587,7 +4587,7 @@
                 <a:latin typeface="Microsoft YaHei"/>
                 <a:ea typeface="Microsoft YaHei"/>
               </a:rPr>
-              <a:t>演讲口径</a:t>
+              <a:t>关键能力</a:t>
             </a:r>
           </a:p>
         </p:txBody>
@@ -4623,7 +4623,7 @@
                 <a:latin typeface="Microsoft YaHei"/>
                 <a:ea typeface="Microsoft YaHei"/>
               </a:rPr>
-              <a:t>Olympiad 顶尖约 77.1%</a:t>
+              <a:t>对约 200 个科学软件实现约 300 倍加速</a:t>
             </a:r>
           </a:p>
         </p:txBody>
@@ -4704,7 +4704,7 @@
                 <a:latin typeface="Microsoft YaHei"/>
                 <a:ea typeface="Microsoft YaHei"/>
               </a:rPr>
-              <a:t>区分奥赛能力与研究能力·2</a:t>
+              <a:t>科学软件加速与多智能体科研演化</a:t>
             </a:r>
           </a:p>
         </p:txBody>
@@ -4740,7 +4740,7 @@
                 <a:latin typeface="Microsoft YaHei"/>
                 <a:ea typeface="Microsoft YaHei"/>
               </a:rPr>
-              <a:t>演讲口径</a:t>
+              <a:t>关键能力</a:t>
             </a:r>
           </a:p>
         </p:txBody>
@@ -4776,7 +4776,7 @@
                 <a:latin typeface="Microsoft YaHei"/>
                 <a:ea typeface="Microsoft YaHei"/>
               </a:rPr>
-              <a:t>Research 顶尖约 25.2%</a:t>
+              <a:t>覆盖 2000+ 任务</a:t>
             </a:r>
           </a:p>
         </p:txBody>
@@ -4855,7 +4855,7 @@
                 <a:latin typeface="Microsoft YaHei"/>
                 <a:ea typeface="Microsoft YaHei"/>
               </a:rPr>
-              <a:t>可落地动作：科学后训练的价值在于把 AI 嵌入真实理论计算与科研协作，而非停留在通用对话能力；用 FrontierScience 等研究级评测牵引数据与训练，才能缩小「会考试」与「会研究」的鸿沟；友商可借鉴「中等参数 + 强后训练 + 多 Agent 科研环境」路线，在垂直科学场景形成差异化。</a:t>
+              <a:t>启示要点：科学后训练的价值在于把 AI 嵌入真实理论计算与科研协作，而非停留在通用对话能力；用 FrontierScience 等研究级评测牵引数据与训练，才能缩小「会考试」与「会研究」的鸿沟；</a:t>
             </a:r>
           </a:p>
         </p:txBody>

--- a/yunqi-2026-pai-forum/docs/洞察一页-04-无尽前延：科学后训练（Auto-Research  Sc.pptx
+++ b/yunqi-2026-pai-forum/docs/洞察一页-04-无尽前延：科学后训练（Auto-Research  Sc.pptx
@@ -4855,7 +4855,7 @@
                 <a:latin typeface="Microsoft YaHei"/>
                 <a:ea typeface="Microsoft YaHei"/>
               </a:rPr>
-              <a:t>启示要点：科学后训练的价值在于把 AI 嵌入真实理论计算与科研协作，而非停留在通用对话能力；用 FrontierScience 等研究级评测牵引数据与训练，才能缩小「会考试」与「会研究」的鸿沟；</a:t>
+              <a:t>启示要点：科学后训练的价值在于把 AI 嵌入真实理论计算与科研协作，而非停留在通用对话能力；用 FrontierScience 等研究级评测牵引数据与训练，才能缩小「会考试」与「会研究」的鸿沟。</a:t>
             </a:r>
           </a:p>
         </p:txBody>
